--- a/media/exports/reports/2025-11/volunteers.pptx
+++ b/media/exports/reports/2025-11/volunteers.pptx
@@ -203,16 +203,16 @@
                   <c:v>Digital literacy</c:v>
                 </c:pt>
                 <c:pt idx="2">
+                  <c:v>Housing support</c:v>
+                </c:pt>
+                <c:pt idx="3">
+                  <c:v>Youth outreach</c:v>
+                </c:pt>
+                <c:pt idx="4">
                   <c:v>Community meals</c:v>
                 </c:pt>
-                <c:pt idx="3">
-                  <c:v>Housing support</c:v>
-                </c:pt>
-                <c:pt idx="4">
+                <c:pt idx="5">
                   <c:v>Mental health first aid</c:v>
-                </c:pt>
-                <c:pt idx="5">
-                  <c:v>Youth outreach</c:v>
                 </c:pt>
               </c:strCache>
             </c:strRef>
@@ -224,22 +224,22 @@
                 <c:formatCode>#,##0;[Red](#,##0)</c:formatCode>
                 <c:ptCount val="6"/>
                 <c:pt idx="0">
-                  <c:v>82.5</c:v>
+                  <c:v>43.5</c:v>
                 </c:pt>
                 <c:pt idx="1">
-                  <c:v>85.5</c:v>
+                  <c:v>107.0</c:v>
                 </c:pt>
                 <c:pt idx="2">
-                  <c:v>89.5</c:v>
+                  <c:v>136.0</c:v>
                 </c:pt>
                 <c:pt idx="3">
-                  <c:v>105.0</c:v>
+                  <c:v>136.5</c:v>
                 </c:pt>
                 <c:pt idx="4">
-                  <c:v>122.5</c:v>
+                  <c:v>155.0</c:v>
                 </c:pt>
                 <c:pt idx="5">
-                  <c:v>141.5</c:v>
+                  <c:v>202.5</c:v>
                 </c:pt>
               </c:numCache>
             </c:numRef>
@@ -303,7 +303,7 @@
       <c:valAx>
         <c:axId val="-2113994440"/>
         <c:scaling>
-          <c:max val="162.725"/>
+          <c:max val="232.87499999999997"/>
           <c:min val="0.0"/>
         </c:scaling>
         <c:delete/>
@@ -439,46 +439,46 @@
                 <c:formatCode>#,##0;[Red](#,##0)</c:formatCode>
                 <c:ptCount val="14"/>
                 <c:pt idx="0">
-                  <c:v>317.5</c:v>
+                  <c:v>381.0</c:v>
                 </c:pt>
                 <c:pt idx="1">
-                  <c:v>392.0</c:v>
+                  <c:v>373.5</c:v>
                 </c:pt>
                 <c:pt idx="2">
-                  <c:v>363.5</c:v>
+                  <c:v>383.5</c:v>
                 </c:pt>
                 <c:pt idx="3">
-                  <c:v>399.0</c:v>
+                  <c:v>387.5</c:v>
                 </c:pt>
                 <c:pt idx="4">
-                  <c:v>422.0</c:v>
+                  <c:v>376.5</c:v>
                 </c:pt>
                 <c:pt idx="5">
-                  <c:v>451.5</c:v>
+                  <c:v>444.0</c:v>
                 </c:pt>
                 <c:pt idx="6">
-                  <c:v>445.0</c:v>
+                  <c:v>422.5</c:v>
                 </c:pt>
                 <c:pt idx="7">
-                  <c:v>513.0</c:v>
+                  <c:v>562.0</c:v>
                 </c:pt>
                 <c:pt idx="8">
-                  <c:v>529.0</c:v>
+                  <c:v>568.0</c:v>
                 </c:pt>
                 <c:pt idx="9">
-                  <c:v>586.0</c:v>
+                  <c:v>609.5</c:v>
                 </c:pt>
                 <c:pt idx="10">
-                  <c:v>560.5</c:v>
+                  <c:v>627.0</c:v>
                 </c:pt>
                 <c:pt idx="11">
-                  <c:v>625.5</c:v>
+                  <c:v>708.5</c:v>
                 </c:pt>
                 <c:pt idx="12">
-                  <c:v>669.5</c:v>
+                  <c:v>817.0</c:v>
                 </c:pt>
                 <c:pt idx="13">
-                  <c:v>626.5</c:v>
+                  <c:v>780.5</c:v>
                 </c:pt>
               </c:numCache>
             </c:numRef>
@@ -527,7 +527,7 @@
         <c:axId val="-2100718248"/>
         <c:scaling>
           <c:orientation val="minMax"/>
-          <c:max val="800.0"/>
+          <c:max val="1000.0"/>
           <c:min val="0.0"/>
         </c:scaling>
         <c:delete val="0"/>
@@ -1052,7 +1052,7 @@
           <a:lstStyle/>
           <a:p>
             <a:r>
-              <a:t>How many volunteer hours go into each program?. Volunteer hours, November: 626.5 h; Volunteers who did a shift, November: 43; Hours per volunteer, November: 14.6 h; November last year: 392.0 h. 43 volunteers gave 626.5 h in November, against 669.5 h in October. Youth outreach drew the most (141.5 h, 22.6%). Volunteer coordinator had the fewest volunteer hours (82.5 h). Hours are up 59.8% on November last year.</a:t>
+              <a:t>How many volunteer hours go into each program?. Volunteer hours, November: 780.5 h; Volunteers who did a shift, November: 56; Hours per volunteer, November: 13.9 h; November last year: 373.5 h. 56 volunteers gave 780.5 h in November, against 817.0 h in October. Mental health first aid drew the most (202.5 h, 25.9%). Volunteer coordinator had the fewest volunteer hours (43.5 h). Hours are up 109.0% on November last year.</a:t>
             </a:r>
           </a:p>
         </p:txBody>
@@ -4537,7 +4537,7 @@
                 </a:solidFill>
                 <a:latin typeface="Roboto"/>
               </a:rPr>
-              <a:t>Data retrieved 2pm, Tue 6 Oct 2026 · Generated 8 Oct 2026, 6:29pm · Sample data · Made with Python (python-pptx)</a:t>
+              <a:t>Data retrieved 2pm, Tue 6 Oct 2026 · Generated 8 Oct 2026, 11:41pm · Sample data · Made with Python (python-pptx)</a:t>
             </a:r>
           </a:p>
         </p:txBody>
@@ -4883,7 +4883,7 @@
                 </a:solidFill>
                 <a:latin typeface="Roboto"/>
               </a:rPr>
-              <a:t>626.5 h</a:t>
+              <a:t>780.5 h</a:t>
             </a:r>
           </a:p>
         </p:txBody>
@@ -4922,7 +4922,7 @@
                 </a:solidFill>
                 <a:latin typeface="Roboto"/>
               </a:rPr>
-              <a:t>October 669.5 h</a:t>
+              <a:t>October 817.0 h</a:t>
             </a:r>
           </a:p>
         </p:txBody>
@@ -5049,7 +5049,7 @@
                 </a:solidFill>
                 <a:latin typeface="Roboto"/>
               </a:rPr>
-              <a:t>43</a:t>
+              <a:t>56</a:t>
             </a:r>
           </a:p>
         </p:txBody>
@@ -5088,7 +5088,7 @@
                 </a:solidFill>
                 <a:latin typeface="Roboto"/>
               </a:rPr>
-              <a:t>October 44</a:t>
+              <a:t>October 54</a:t>
             </a:r>
           </a:p>
         </p:txBody>
@@ -5215,7 +5215,7 @@
                 </a:solidFill>
                 <a:latin typeface="Roboto"/>
               </a:rPr>
-              <a:t>14.6 h</a:t>
+              <a:t>13.9 h</a:t>
             </a:r>
           </a:p>
         </p:txBody>
@@ -5381,7 +5381,7 @@
                 </a:solidFill>
                 <a:latin typeface="Roboto"/>
               </a:rPr>
-              <a:t>392.0 h</a:t>
+              <a:t>373.5 h</a:t>
             </a:r>
           </a:p>
         </p:txBody>
@@ -5420,7 +5420,7 @@
                 </a:solidFill>
                 <a:latin typeface="Roboto"/>
               </a:rPr>
-              <a:t>28 volunteers</a:t>
+              <a:t>27 volunteers</a:t>
             </a:r>
           </a:p>
         </p:txBody>
@@ -5565,7 +5565,7 @@
                 </a:solidFill>
                 <a:latin typeface="Roboto"/>
               </a:rPr>
-              <a:t>43 volunteers gave 626.5 h in November, against 669.5 h in October. Youth outreach drew the most (141.5 h, 22.6%).</a:t>
+              <a:t>56 volunteers gave 780.5 h in November, against 817.0 h in October. Mental health first aid drew the most (202.5 h, 25.9%).</a:t>
             </a:r>
           </a:p>
         </p:txBody>
@@ -5692,7 +5692,7 @@
                 </a:solidFill>
                 <a:latin typeface="Roboto"/>
               </a:rPr>
-              <a:t>Volunteer coordinator had the fewest volunteer hours (82.5 h). Hours are up 59.8% on November last year.</a:t>
+              <a:t>Volunteer coordinator had the fewest volunteer hours (43.5 h). Hours are up 109.0% on November last year.</a:t>
             </a:r>
           </a:p>
         </p:txBody>
@@ -5770,7 +5770,7 @@
                 </a:solidFill>
                 <a:latin typeface="Roboto"/>
               </a:rPr>
-              <a:t>Data retrieved 2pm, Tue 6 Oct 2026 · Generated 8 Oct 2026, 6:29pm · Sample data · Made with Python (python-pptx)</a:t>
+              <a:t>Data retrieved 2pm, Tue 6 Oct 2026 · Generated 8 Oct 2026, 11:41pm · Sample data · Made with Python (python-pptx)</a:t>
             </a:r>
           </a:p>
         </p:txBody>
@@ -6085,7 +6085,7 @@
                 </a:solidFill>
                 <a:latin typeface="Roboto"/>
               </a:rPr>
-              <a:t>Data retrieved 2pm, Tue 6 Oct 2026 · Generated 8 Oct 2026, 6:29pm · Sample data · Made with Python (python-pptx)</a:t>
+              <a:t>Data retrieved 2pm, Tue 6 Oct 2026 · Generated 8 Oct 2026, 11:41pm · Sample data · Made with Python (python-pptx)</a:t>
             </a:r>
           </a:p>
         </p:txBody>

--- a/media/exports/reports/2025-11/volunteers.pptx
+++ b/media/exports/reports/2025-11/volunteers.pptx
@@ -982,7 +982,7 @@
           <a:lstStyle/>
           <a:p>
             <a:r>
-              <a:t>How many volunteer hours go into each program?. Sample Community Services Ltd. Period: November 2025. Every volunteer shift: who (a code, not a name), which program, and how many hours.</a:t>
+              <a:t>How many volunteer hours go into each program?. Sample Community Services Ltd. Period: November 2025. In short: 780.5 h of volunteer time in November, from 56 volunteers; most went to Mental health first aid. Every volunteer shift: who (a code, not a name), which program, and how many hours.</a:t>
             </a:r>
           </a:p>
         </p:txBody>
@@ -4347,7 +4347,7 @@
         <p:spPr>
           <a:xfrm>
             <a:off x="457200" y="3703320"/>
-            <a:ext cx="11277295" cy="313690"/>
+            <a:ext cx="11277295" cy="535940"/>
           </a:xfrm>
           <a:prstGeom prst="rect">
             <a:avLst/>
@@ -4372,7 +4372,7 @@
                 </a:solidFill>
                 <a:latin typeface="Roboto"/>
               </a:rPr>
-              <a:t>Period: November 2025. Every volunteer shift: who (a code, not a name), which program, and how many hours.</a:t>
+              <a:t>Period: November 2025. In short: 780.5 h of volunteer time in November, from 56 volunteers; most went to Mental health first aid. Every volunteer shift: who (a code, not a name), which program, and how many hours.</a:t>
             </a:r>
           </a:p>
         </p:txBody>
@@ -4385,7 +4385,7 @@
         </p:nvSpPr>
         <p:spPr>
           <a:xfrm>
-            <a:off x="457200" y="4108450"/>
+            <a:off x="457200" y="4330700"/>
             <a:ext cx="11277295" cy="1097280"/>
           </a:xfrm>
           <a:prstGeom prst="rect">
@@ -4537,7 +4537,7 @@
                 </a:solidFill>
                 <a:latin typeface="Roboto"/>
               </a:rPr>
-              <a:t>Data retrieved 2pm, Tue 6 Oct 2026 · Generated 8 Oct 2026, 11:41pm · Sample data · Made with Python (python-pptx)</a:t>
+              <a:t>Data retrieved 2pm, Tue 6 Oct 2026 · Generated 10 Oct 2026, 9:55pm · Sample data · Made with Python (python-pptx)</a:t>
             </a:r>
           </a:p>
         </p:txBody>
@@ -5770,7 +5770,7 @@
                 </a:solidFill>
                 <a:latin typeface="Roboto"/>
               </a:rPr>
-              <a:t>Data retrieved 2pm, Tue 6 Oct 2026 · Generated 8 Oct 2026, 11:41pm · Sample data · Made with Python (python-pptx)</a:t>
+              <a:t>Data retrieved 2pm, Tue 6 Oct 2026 · Generated 10 Oct 2026, 9:55pm · Sample data · Made with Python (python-pptx)</a:t>
             </a:r>
           </a:p>
         </p:txBody>
@@ -6085,7 +6085,7 @@
                 </a:solidFill>
                 <a:latin typeface="Roboto"/>
               </a:rPr>
-              <a:t>Data retrieved 2pm, Tue 6 Oct 2026 · Generated 8 Oct 2026, 11:41pm · Sample data · Made with Python (python-pptx)</a:t>
+              <a:t>Data retrieved 2pm, Tue 6 Oct 2026 · Generated 10 Oct 2026, 9:55pm · Sample data · Made with Python (python-pptx)</a:t>
             </a:r>
           </a:p>
         </p:txBody>
